--- a/src/srstudio/assets/poster_templates/legacy/models/CLUBE_EXCLUSIVO.pptx
+++ b/src/srstudio/assets/poster_templates/legacy/models/CLUBE_EXCLUSIVO.pptx
@@ -3402,7 +3402,7 @@
 </file>
 
 <file path=ppt/slides/slide1.xml><?xml version="1.0" encoding="utf-8"?>
-<p:sld xmlns:a="http://schemas.openxmlformats.org/drawingml/2006/main" xmlns:r="http://schemas.openxmlformats.org/officeDocument/2006/relationships" xmlns:p="http://schemas.openxmlformats.org/presentationml/2006/main">
+<p:sld xmlns:a="http://schemas.openxmlformats.org/drawingml/2006/main" xmlns:r="http://schemas.openxmlformats.org/officeDocument/2006/relationships" xmlns:p="http://schemas.openxmlformats.org/presentationml/2006/main" showMasterSp="1">
   <p:cSld>
     <p:spTree>
       <p:nvGrpSpPr>
@@ -3530,7 +3530,7 @@
             </a:extLst>
           </p:cNvPr>
           <p:cNvSpPr>
-            <a:spLocks noChangeArrowheads="1" noChangeShapeType="1"/>
+            <a:spLocks noChangeArrowheads="1" noChangeShapeType="1" noTextEdit="1"/>
           </p:cNvSpPr>
           <p:nvPr/>
         </p:nvSpPr>
@@ -3571,49 +3571,6 @@
           </a:p>
         </p:txBody>
       </p:sp>
-      <p:cxnSp>
-        <p:nvCxnSpPr>
-          <p:cNvPr id="19" name="Conector reto 18">
-            <a:extLst>
-              <a:ext uri="{FF2B5EF4-FFF2-40B4-BE49-F238E27FC236}">
-                <a16:creationId xmlns:a16="http://schemas.microsoft.com/office/drawing/2014/main" id="{0476FEC4-224F-41A1-8421-3CF267C4522B}"/>
-              </a:ext>
-            </a:extLst>
-          </p:cNvPr>
-          <p:cNvCxnSpPr>
-            <a:cxnSpLocks/>
-          </p:cNvCxnSpPr>
-          <p:nvPr/>
-        </p:nvCxnSpPr>
-        <p:spPr>
-          <a:xfrm flipH="1">
-            <a:off x="790170" y="1539630"/>
-            <a:ext cx="3655781" cy="0"/>
-          </a:xfrm>
-          <a:prstGeom prst="line">
-            <a:avLst/>
-          </a:prstGeom>
-          <a:ln w="38100">
-            <a:solidFill>
-              <a:schemeClr val="tx1"/>
-            </a:solidFill>
-          </a:ln>
-        </p:spPr>
-        <p:style>
-          <a:lnRef idx="1">
-            <a:schemeClr val="accent1"/>
-          </a:lnRef>
-          <a:fillRef idx="0">
-            <a:schemeClr val="accent1"/>
-          </a:fillRef>
-          <a:effectRef idx="0">
-            <a:schemeClr val="accent1"/>
-          </a:effectRef>
-          <a:fontRef idx="minor">
-            <a:schemeClr val="tx1"/>
-          </a:fontRef>
-        </p:style>
-      </p:cxnSp>
       <p:pic>
         <p:nvPicPr>
           <p:cNvPr id="22" name="Imagem 3">
@@ -3629,7 +3586,7 @@
           <p:nvPr/>
         </p:nvPicPr>
         <p:blipFill>
-          <a:blip r:embed="rId3">
+          <a:blip r:embed="rIdReference1">
             <a:extLst>
               <a:ext uri="{28A0092B-C50C-407E-A947-70E740481C1C}">
                 <a14:useLocalDpi xmlns:a14="http://schemas.microsoft.com/office/drawing/2010/main" val="0"/>
@@ -3643,7 +3600,7 @@
         </p:blipFill>
         <p:spPr bwMode="auto">
           <a:xfrm>
-            <a:off x="4185658" y="6763102"/>
+            <a:off x="5719183" y="6751328"/>
             <a:ext cx="1145512" cy="751111"/>
           </a:xfrm>
           <a:prstGeom prst="rect">
@@ -3676,57 +3633,6 @@
       </p:pic>
       <p:sp>
         <p:nvSpPr>
-          <p:cNvPr id="24" name="WordArt 4">
-            <a:extLst>
-              <a:ext uri="{FF2B5EF4-FFF2-40B4-BE49-F238E27FC236}">
-                <a16:creationId xmlns:a16="http://schemas.microsoft.com/office/drawing/2014/main" id="{E8DEEAE6-C9E7-FBCF-BBD5-032AE254EB02}"/>
-              </a:ext>
-            </a:extLst>
-          </p:cNvPr>
-          <p:cNvSpPr>
-            <a:spLocks noChangeArrowheads="1" noChangeShapeType="1" noTextEdit="1"/>
-          </p:cNvSpPr>
-          <p:nvPr/>
-        </p:nvSpPr>
-        <p:spPr bwMode="auto">
-          <a:xfrm>
-            <a:off x="764229" y="283002"/>
-            <a:ext cx="3512465" cy="1267863"/>
-          </a:xfrm>
-          <a:prstGeom prst="rect">
-            <a:avLst/>
-          </a:prstGeom>
-        </p:spPr>
-        <p:txBody>
-          <a:bodyPr wrap="none" fromWordArt="1">
-            <a:prstTxWarp prst="textPlain">
-              <a:avLst>
-                <a:gd name="adj" fmla="val 50000"/>
-              </a:avLst>
-            </a:prstTxWarp>
-          </a:bodyPr>
-          <a:lstStyle/>
-          <a:p>
-            <a:pPr algn="ctr"/>
-            <a:r>
-              <a:rPr lang="pt-BR" sz="3616" kern="10" dirty="0">
-                <a:ln w="9525">
-                  <a:solidFill>
-                    <a:schemeClr val="tx1"/>
-                  </a:solidFill>
-                  <a:round/>
-                  <a:headEnd/>
-                  <a:tailEnd/>
-                </a:ln>
-                <a:latin typeface="Algerian" panose="04020705040A02060702" pitchFamily="82" charset="0"/>
-              </a:rPr>
-              <a:t>OFERTA</a:t>
-            </a:r>
-          </a:p>
-        </p:txBody>
-      </p:sp>
-      <p:sp>
-        <p:nvSpPr>
           <p:cNvPr id="6" name="SR_CLUBE_PRODUTO">
             <a:extLst>
               <a:ext uri="{FF2B5EF4-FFF2-40B4-BE49-F238E27FC236}">
@@ -3735,13 +3641,13 @@
             </a:extLst>
           </p:cNvPr>
           <p:cNvSpPr>
-            <a:spLocks noChangeArrowheads="1" noChangeShapeType="1"/>
+            <a:spLocks noChangeArrowheads="1" noChangeShapeType="1" noTextEdit="1"/>
           </p:cNvSpPr>
           <p:nvPr/>
         </p:nvSpPr>
         <p:spPr bwMode="auto">
           <a:xfrm>
-            <a:off x="260369" y="1849867"/>
+            <a:off x="260369" y="1943225"/>
             <a:ext cx="4822296" cy="2008084"/>
           </a:xfrm>
           <a:prstGeom prst="rect">
@@ -3807,7 +3713,7 @@
         </p:nvSpPr>
         <p:spPr>
           <a:xfrm>
-            <a:off x="-2351" y="3944101"/>
+            <a:off x="1" y="4035812"/>
             <a:ext cx="5400674" cy="458052"/>
           </a:xfrm>
           <a:prstGeom prst="rect">
@@ -3859,7 +3765,7 @@
             </a:extLst>
           </p:cNvPr>
           <p:cNvSpPr>
-            <a:spLocks noChangeArrowheads="1" noChangeShapeType="1"/>
+            <a:spLocks noChangeArrowheads="1" noChangeShapeType="1" noTextEdit="1"/>
           </p:cNvSpPr>
           <p:nvPr/>
         </p:nvSpPr>
@@ -3895,7 +3801,7 @@
                 </a:ln>
                 <a:latin typeface="Algerian" panose="04020705040A02060702" pitchFamily="82" charset="0"/>
               </a:rPr>
-              <a:t>VÁLIDO</a:t>
+              <a:t>VáliVálida</a:t>
             </a:r>
             <a:r>
               <a:rPr lang="pt-BR" sz="3616" kern="10" dirty="0">
@@ -4119,7 +4025,7 @@
             <p:nvPr/>
           </p:nvPicPr>
           <p:blipFill>
-            <a:blip r:embed="rId4"/>
+            <a:blip r:embed="rIdReference5"/>
             <a:stretch>
               <a:fillRect/>
             </a:stretch>
@@ -4253,7 +4159,7 @@
           <p:nvPr/>
         </p:nvPicPr>
         <p:blipFill>
-          <a:blip r:embed="rId5"/>
+          <a:blip r:embed="rIdReference4"/>
           <a:stretch>
             <a:fillRect/>
           </a:stretch>
